--- a/aarki_lead_quality_report.pptx
+++ b/aarki_lead_quality_report.pptx
@@ -5,7 +5,7 @@
     <p:sldMasterId id="2147483648" r:id="rId1"/>
   </p:sldMasterIdLst>
   <p:notesMasterIdLst>
-    <p:notesMasterId r:id="rId17"/>
+    <p:notesMasterId r:id="rId18"/>
   </p:notesMasterIdLst>
   <p:sldIdLst>
     <p:sldId id="256" r:id="rId2"/>
@@ -22,7 +22,8 @@
     <p:sldId id="268" r:id="rId13"/>
     <p:sldId id="269" r:id="rId14"/>
     <p:sldId id="265" r:id="rId15"/>
-    <p:sldId id="266" r:id="rId16"/>
+    <p:sldId id="271" r:id="rId16"/>
+    <p:sldId id="266" r:id="rId17"/>
   </p:sldIdLst>
   <p:sldSz cx="6858000" cy="9144000" type="screen4x3"/>
   <p:notesSz cx="9144000" cy="6858000"/>
@@ -784,6 +785,114 @@
   <p:cSld>
     <p:spTree>
       <p:nvGrpSpPr>
+        <p:cNvPr id="1" name="">
+          <a:extLst>
+            <a:ext uri="{FF2B5EF4-FFF2-40B4-BE49-F238E27FC236}">
+              <a16:creationId xmlns:a16="http://schemas.microsoft.com/office/drawing/2014/main" id="{B5DC5E63-7CD4-1565-16A9-4690FE70ABD9}"/>
+            </a:ext>
+          </a:extLst>
+        </p:cNvPr>
+        <p:cNvGrpSpPr/>
+        <p:nvPr/>
+      </p:nvGrpSpPr>
+      <p:grpSpPr>
+        <a:xfrm>
+          <a:off x="0" y="0"/>
+          <a:ext cx="0" cy="0"/>
+          <a:chOff x="0" y="0"/>
+          <a:chExt cx="0" cy="0"/>
+        </a:xfrm>
+      </p:grpSpPr>
+      <p:sp>
+        <p:nvSpPr>
+          <p:cNvPr id="2" name="Slide Image Placeholder 1">
+            <a:extLst>
+              <a:ext uri="{FF2B5EF4-FFF2-40B4-BE49-F238E27FC236}">
+                <a16:creationId xmlns:a16="http://schemas.microsoft.com/office/drawing/2014/main" id="{CAF8DE28-0575-A466-E679-722EADE166A1}"/>
+              </a:ext>
+            </a:extLst>
+          </p:cNvPr>
+          <p:cNvSpPr>
+            <a:spLocks noGrp="1" noRot="1" noChangeAspect="1"/>
+          </p:cNvSpPr>
+          <p:nvPr>
+            <p:ph type="sldImg"/>
+          </p:nvPr>
+        </p:nvSpPr>
+        <p:spPr/>
+      </p:sp>
+      <p:sp>
+        <p:nvSpPr>
+          <p:cNvPr id="3" name="Notes Placeholder 2">
+            <a:extLst>
+              <a:ext uri="{FF2B5EF4-FFF2-40B4-BE49-F238E27FC236}">
+                <a16:creationId xmlns:a16="http://schemas.microsoft.com/office/drawing/2014/main" id="{77F2FDD4-F661-D086-B5C8-50813B43085C}"/>
+              </a:ext>
+            </a:extLst>
+          </p:cNvPr>
+          <p:cNvSpPr>
+            <a:spLocks noGrp="1"/>
+          </p:cNvSpPr>
+          <p:nvPr>
+            <p:ph type="body" idx="1"/>
+          </p:nvPr>
+        </p:nvSpPr>
+        <p:spPr/>
+        <p:txBody>
+          <a:bodyPr/>
+          <a:lstStyle/>
+          <a:p>
+            <a:endParaRPr lang="en-US" dirty="0"/>
+          </a:p>
+        </p:txBody>
+      </p:sp>
+      <p:sp>
+        <p:nvSpPr>
+          <p:cNvPr id="4" name="Slide Number Placeholder 3">
+            <a:extLst>
+              <a:ext uri="{FF2B5EF4-FFF2-40B4-BE49-F238E27FC236}">
+                <a16:creationId xmlns:a16="http://schemas.microsoft.com/office/drawing/2014/main" id="{1BD3D91A-6599-CD4A-9BB7-1CC4B78010E8}"/>
+              </a:ext>
+            </a:extLst>
+          </p:cNvPr>
+          <p:cNvSpPr>
+            <a:spLocks noGrp="1"/>
+          </p:cNvSpPr>
+          <p:nvPr>
+            <p:ph type="sldNum" sz="quarter" idx="10"/>
+          </p:nvPr>
+        </p:nvSpPr>
+        <p:spPr/>
+        <p:txBody>
+          <a:bodyPr/>
+          <a:lstStyle/>
+          <a:p>
+            <a:fld id="{F7021451-1387-4CA6-816F-3879F97B5CBC}" type="slidenum">
+              <a:rPr lang="en-US"/>
+              <a:t>15</a:t>
+            </a:fld>
+            <a:endParaRPr lang="en-US"/>
+          </a:p>
+        </p:txBody>
+      </p:sp>
+    </p:spTree>
+    <p:extLst>
+      <p:ext uri="{BB962C8B-B14F-4D97-AF65-F5344CB8AC3E}">
+        <p14:creationId xmlns:p14="http://schemas.microsoft.com/office/powerpoint/2010/main" val="3643522923"/>
+      </p:ext>
+    </p:extLst>
+  </p:cSld>
+  <p:clrMapOvr>
+    <a:masterClrMapping/>
+  </p:clrMapOvr>
+</p:notes>
+</file>
+
+<file path=ppt/notesSlides/notesSlide16.xml><?xml version="1.0" encoding="utf-8"?>
+<p:notes xmlns:a="http://schemas.openxmlformats.org/drawingml/2006/main" xmlns:r="http://schemas.openxmlformats.org/officeDocument/2006/relationships" xmlns:p="http://schemas.openxmlformats.org/presentationml/2006/main">
+  <p:cSld>
+    <p:spTree>
+      <p:nvGrpSpPr>
         <p:cNvPr id="1" name=""/>
         <p:cNvGrpSpPr/>
         <p:nvPr/>
@@ -844,7 +953,7 @@
           <a:p>
             <a:fld id="{F7021451-1387-4CA6-816F-3879F97B5CBC}" type="slidenum">
               <a:rPr lang="en-US"/>
-              <a:t>15</a:t>
+              <a:t>16</a:t>
             </a:fld>
             <a:endParaRPr lang="en-US"/>
           </a:p>
@@ -2176,6 +2285,255 @@
           </a:p>
         </p:txBody>
       </p:sp>
+      <p:sp>
+        <p:nvSpPr>
+          <p:cNvPr id="10" name="Text 6">
+            <a:extLst>
+              <a:ext uri="{FF2B5EF4-FFF2-40B4-BE49-F238E27FC236}">
+                <a16:creationId xmlns:a16="http://schemas.microsoft.com/office/drawing/2014/main" id="{70A0633B-8E6A-AB41-0CF4-09B31A952865}"/>
+              </a:ext>
+            </a:extLst>
+          </p:cNvPr>
+          <p:cNvSpPr/>
+          <p:nvPr/>
+        </p:nvSpPr>
+        <p:spPr>
+          <a:xfrm>
+            <a:off x="457200" y="4407408"/>
+            <a:ext cx="5943600" cy="274320"/>
+          </a:xfrm>
+          <a:prstGeom prst="rect">
+            <a:avLst/>
+          </a:prstGeom>
+          <a:noFill/>
+          <a:ln/>
+        </p:spPr>
+        <p:txBody>
+          <a:bodyPr wrap="square" lIns="0" tIns="0" rIns="0" bIns="0" rtlCol="0" anchor="ctr"/>
+          <a:lstStyle/>
+          <a:p>
+            <a:pPr marL="0" indent="0">
+              <a:buNone/>
+            </a:pPr>
+            <a:r>
+              <a:rPr lang="en-US" sz="1000" b="1" dirty="0">
+                <a:solidFill>
+                  <a:srgbClr val="A8C8D0"/>
+                </a:solidFill>
+                <a:latin typeface="Calibri" pitchFamily="34" charset="0"/>
+                <a:ea typeface="Calibri" pitchFamily="34" charset="-122"/>
+                <a:cs typeface="Calibri" pitchFamily="34" charset="-120"/>
+              </a:rPr>
+              <a:t>Xiaoai Zhu</a:t>
+            </a:r>
+            <a:endParaRPr lang="en-US" sz="1000" dirty="0"/>
+          </a:p>
+        </p:txBody>
+      </p:sp>
+      <p:sp>
+        <p:nvSpPr>
+          <p:cNvPr id="11" name="Text 6">
+            <a:extLst>
+              <a:ext uri="{FF2B5EF4-FFF2-40B4-BE49-F238E27FC236}">
+                <a16:creationId xmlns:a16="http://schemas.microsoft.com/office/drawing/2014/main" id="{80A72E21-7DFC-A46F-9BDF-2A794609F7A2}"/>
+              </a:ext>
+            </a:extLst>
+          </p:cNvPr>
+          <p:cNvSpPr/>
+          <p:nvPr/>
+        </p:nvSpPr>
+        <p:spPr>
+          <a:xfrm>
+            <a:off x="457200" y="4681728"/>
+            <a:ext cx="5943600" cy="274320"/>
+          </a:xfrm>
+          <a:prstGeom prst="rect">
+            <a:avLst/>
+          </a:prstGeom>
+          <a:noFill/>
+          <a:ln/>
+        </p:spPr>
+        <p:txBody>
+          <a:bodyPr wrap="square" lIns="0" tIns="0" rIns="0" bIns="0" rtlCol="0" anchor="ctr"/>
+          <a:lstStyle/>
+          <a:p>
+            <a:pPr marL="0" indent="0">
+              <a:buNone/>
+            </a:pPr>
+            <a:r>
+              <a:rPr lang="en-US" sz="1000" b="1" dirty="0">
+                <a:solidFill>
+                  <a:srgbClr val="A8C8D0"/>
+                </a:solidFill>
+                <a:latin typeface="Calibri" pitchFamily="34" charset="0"/>
+                <a:ea typeface="Calibri" pitchFamily="34" charset="-122"/>
+                <a:cs typeface="Calibri" pitchFamily="34" charset="-120"/>
+              </a:rPr>
+              <a:t>Fiona.zhu0906@gmail.com</a:t>
+            </a:r>
+            <a:endParaRPr lang="en-US" sz="1000" dirty="0"/>
+          </a:p>
+        </p:txBody>
+      </p:sp>
+      <p:sp>
+        <p:nvSpPr>
+          <p:cNvPr id="12" name="Text 6">
+            <a:extLst>
+              <a:ext uri="{FF2B5EF4-FFF2-40B4-BE49-F238E27FC236}">
+                <a16:creationId xmlns:a16="http://schemas.microsoft.com/office/drawing/2014/main" id="{EB4AD80C-17B6-5DB5-4FFC-0233C02B3FD2}"/>
+              </a:ext>
+            </a:extLst>
+          </p:cNvPr>
+          <p:cNvSpPr/>
+          <p:nvPr/>
+        </p:nvSpPr>
+        <p:spPr>
+          <a:xfrm>
+            <a:off x="457200" y="5010910"/>
+            <a:ext cx="5943600" cy="475489"/>
+          </a:xfrm>
+          <a:prstGeom prst="rect">
+            <a:avLst/>
+          </a:prstGeom>
+          <a:noFill/>
+          <a:ln/>
+        </p:spPr>
+        <p:txBody>
+          <a:bodyPr wrap="square" lIns="0" tIns="0" rIns="0" bIns="0" rtlCol="0" anchor="ctr"/>
+          <a:lstStyle/>
+          <a:p>
+            <a:r>
+              <a:rPr lang="en-US" sz="1000" b="1" dirty="0">
+                <a:solidFill>
+                  <a:srgbClr val="A8C8D0"/>
+                </a:solidFill>
+                <a:latin typeface="Calibri" pitchFamily="34" charset="0"/>
+                <a:ea typeface="Calibri" pitchFamily="34" charset="-122"/>
+                <a:cs typeface="Calibri" pitchFamily="34" charset="-120"/>
+              </a:rPr>
+              <a:t>All analysis and visualization were conducted using Python (Pandas, </a:t>
+            </a:r>
+            <a:r>
+              <a:rPr lang="en-US" sz="1000" b="1" dirty="0" err="1">
+                <a:solidFill>
+                  <a:srgbClr val="A8C8D0"/>
+                </a:solidFill>
+                <a:latin typeface="Calibri" pitchFamily="34" charset="0"/>
+                <a:ea typeface="Calibri" pitchFamily="34" charset="-122"/>
+                <a:cs typeface="Calibri" pitchFamily="34" charset="-120"/>
+              </a:rPr>
+              <a:t>numpy</a:t>
+            </a:r>
+            <a:r>
+              <a:rPr lang="en-US" sz="1000" b="1" dirty="0">
+                <a:solidFill>
+                  <a:srgbClr val="A8C8D0"/>
+                </a:solidFill>
+                <a:latin typeface="Calibri" pitchFamily="34" charset="0"/>
+                <a:ea typeface="Calibri" pitchFamily="34" charset="-122"/>
+                <a:cs typeface="Calibri" pitchFamily="34" charset="-120"/>
+              </a:rPr>
+              <a:t>, matplotlib, </a:t>
+            </a:r>
+            <a:r>
+              <a:rPr lang="en-US" sz="1000" b="1" dirty="0" err="1">
+                <a:solidFill>
+                  <a:srgbClr val="A8C8D0"/>
+                </a:solidFill>
+                <a:latin typeface="Calibri" pitchFamily="34" charset="0"/>
+                <a:ea typeface="Calibri" pitchFamily="34" charset="-122"/>
+                <a:cs typeface="Calibri" pitchFamily="34" charset="-120"/>
+              </a:rPr>
+              <a:t>plotly</a:t>
+            </a:r>
+            <a:r>
+              <a:rPr lang="en-US" sz="1000" b="1" dirty="0">
+                <a:solidFill>
+                  <a:srgbClr val="A8C8D0"/>
+                </a:solidFill>
+                <a:latin typeface="Calibri" pitchFamily="34" charset="0"/>
+                <a:ea typeface="Calibri" pitchFamily="34" charset="-122"/>
+                <a:cs typeface="Calibri" pitchFamily="34" charset="-120"/>
+              </a:rPr>
+              <a:t>, </a:t>
+            </a:r>
+            <a:r>
+              <a:rPr lang="en-US" sz="1000" b="1" dirty="0" err="1">
+                <a:solidFill>
+                  <a:srgbClr val="A8C8D0"/>
+                </a:solidFill>
+                <a:latin typeface="Calibri" pitchFamily="34" charset="0"/>
+                <a:ea typeface="Calibri" pitchFamily="34" charset="-122"/>
+                <a:cs typeface="Calibri" pitchFamily="34" charset="-120"/>
+              </a:rPr>
+              <a:t>scipy</a:t>
+            </a:r>
+            <a:r>
+              <a:rPr lang="en-US" sz="1000" b="1" dirty="0">
+                <a:solidFill>
+                  <a:srgbClr val="A8C8D0"/>
+                </a:solidFill>
+                <a:latin typeface="Calibri" pitchFamily="34" charset="0"/>
+                <a:ea typeface="Calibri" pitchFamily="34" charset="-122"/>
+                <a:cs typeface="Calibri" pitchFamily="34" charset="-120"/>
+              </a:rPr>
+              <a:t>). Full code and all plot see in my </a:t>
+            </a:r>
+            <a:r>
+              <a:rPr lang="en-US" sz="1000" b="1" dirty="0" err="1">
+                <a:solidFill>
+                  <a:srgbClr val="A8C8D0"/>
+                </a:solidFill>
+                <a:latin typeface="Calibri" pitchFamily="34" charset="0"/>
+                <a:ea typeface="Calibri" pitchFamily="34" charset="-122"/>
+                <a:cs typeface="Calibri" pitchFamily="34" charset="-120"/>
+              </a:rPr>
+              <a:t>github</a:t>
+            </a:r>
+            <a:r>
+              <a:rPr lang="en-US" sz="1000" b="1" dirty="0">
+                <a:solidFill>
+                  <a:srgbClr val="A8C8D0"/>
+                </a:solidFill>
+                <a:latin typeface="Calibri" pitchFamily="34" charset="0"/>
+                <a:ea typeface="Calibri" pitchFamily="34" charset="-122"/>
+                <a:cs typeface="Calibri" pitchFamily="34" charset="-120"/>
+              </a:rPr>
+              <a:t> link: </a:t>
+            </a:r>
+            <a:r>
+              <a:rPr lang="en-US" sz="1000" b="1" dirty="0">
+                <a:solidFill>
+                  <a:srgbClr val="A8C8D0"/>
+                </a:solidFill>
+                <a:latin typeface="Calibri" pitchFamily="34" charset="0"/>
+                <a:ea typeface="Calibri" pitchFamily="34" charset="-122"/>
+                <a:cs typeface="Calibri" pitchFamily="34" charset="-120"/>
+                <a:hlinkClick r:id="rId3"/>
+              </a:rPr>
+              <a:t>https://github.com/xzhu411/Aarki.git</a:t>
+            </a:r>
+            <a:endParaRPr lang="en-US" sz="1000" b="1" dirty="0">
+              <a:solidFill>
+                <a:srgbClr val="A8C8D0"/>
+              </a:solidFill>
+              <a:latin typeface="Calibri" pitchFamily="34" charset="0"/>
+              <a:ea typeface="Calibri" pitchFamily="34" charset="-122"/>
+              <a:cs typeface="Calibri" pitchFamily="34" charset="-120"/>
+            </a:endParaRPr>
+          </a:p>
+          <a:p>
+            <a:endParaRPr lang="en-US" sz="1000" b="1" dirty="0">
+              <a:solidFill>
+                <a:srgbClr val="A8C8D0"/>
+              </a:solidFill>
+              <a:latin typeface="Calibri" pitchFamily="34" charset="0"/>
+              <a:ea typeface="Calibri" pitchFamily="34" charset="-122"/>
+              <a:cs typeface="Calibri" pitchFamily="34" charset="-120"/>
+            </a:endParaRPr>
+          </a:p>
+        </p:txBody>
+      </p:sp>
     </p:spTree>
   </p:cSld>
   <p:clrMapOvr>
@@ -3151,7 +3509,7 @@
                   <a:srgbClr val="FFFFFF"/>
                 </a:solidFill>
               </a:rPr>
-              <a:t>9</a:t>
+              <a:t>10</a:t>
             </a:r>
             <a:endParaRPr lang="en-US" sz="800" dirty="0"/>
           </a:p>
@@ -6331,7 +6689,49 @@
           <a:bodyPr/>
           <a:lstStyle/>
           <a:p>
-            <a:endParaRPr lang="en-US"/>
+            <a:endParaRPr lang="en-US" dirty="0"/>
+          </a:p>
+        </p:txBody>
+      </p:sp>
+      <p:sp>
+        <p:nvSpPr>
+          <p:cNvPr id="11" name="Text 10">
+            <a:extLst>
+              <a:ext uri="{FF2B5EF4-FFF2-40B4-BE49-F238E27FC236}">
+                <a16:creationId xmlns:a16="http://schemas.microsoft.com/office/drawing/2014/main" id="{CAECFE74-8FDD-A31E-33F2-F26326E8B997}"/>
+              </a:ext>
+            </a:extLst>
+          </p:cNvPr>
+          <p:cNvSpPr/>
+          <p:nvPr/>
+        </p:nvSpPr>
+        <p:spPr>
+          <a:xfrm>
+            <a:off x="6217920" y="8915400"/>
+            <a:ext cx="457200" cy="228600"/>
+          </a:xfrm>
+          <a:prstGeom prst="rect">
+            <a:avLst/>
+          </a:prstGeom>
+          <a:noFill/>
+          <a:ln/>
+        </p:spPr>
+        <p:txBody>
+          <a:bodyPr wrap="square" lIns="0" tIns="0" rIns="0" bIns="0" rtlCol="0" anchor="ctr"/>
+          <a:lstStyle/>
+          <a:p>
+            <a:pPr marL="0" indent="0" algn="ctr">
+              <a:buNone/>
+            </a:pPr>
+            <a:r>
+              <a:rPr lang="en-US" sz="800" dirty="0">
+                <a:solidFill>
+                  <a:srgbClr val="FFFFFF"/>
+                </a:solidFill>
+              </a:rPr>
+              <a:t>11</a:t>
+            </a:r>
+            <a:endParaRPr lang="en-US" sz="800" dirty="0"/>
           </a:p>
         </p:txBody>
       </p:sp>
@@ -9953,6 +10353,48 @@
           </a:p>
         </p:txBody>
       </p:sp>
+      <p:sp>
+        <p:nvSpPr>
+          <p:cNvPr id="16" name="Text 10">
+            <a:extLst>
+              <a:ext uri="{FF2B5EF4-FFF2-40B4-BE49-F238E27FC236}">
+                <a16:creationId xmlns:a16="http://schemas.microsoft.com/office/drawing/2014/main" id="{C996177B-39C6-8BBE-56D6-A5642C2DA4F7}"/>
+              </a:ext>
+            </a:extLst>
+          </p:cNvPr>
+          <p:cNvSpPr/>
+          <p:nvPr/>
+        </p:nvSpPr>
+        <p:spPr>
+          <a:xfrm>
+            <a:off x="6217920" y="8915400"/>
+            <a:ext cx="457200" cy="228600"/>
+          </a:xfrm>
+          <a:prstGeom prst="rect">
+            <a:avLst/>
+          </a:prstGeom>
+          <a:noFill/>
+          <a:ln/>
+        </p:spPr>
+        <p:txBody>
+          <a:bodyPr wrap="square" lIns="0" tIns="0" rIns="0" bIns="0" rtlCol="0" anchor="ctr"/>
+          <a:lstStyle/>
+          <a:p>
+            <a:pPr marL="0" indent="0" algn="ctr">
+              <a:buNone/>
+            </a:pPr>
+            <a:r>
+              <a:rPr lang="en-US" sz="800" dirty="0">
+                <a:solidFill>
+                  <a:srgbClr val="FFFFFF"/>
+                </a:solidFill>
+              </a:rPr>
+              <a:t>12</a:t>
+            </a:r>
+            <a:endParaRPr lang="en-US" sz="800" dirty="0"/>
+          </a:p>
+        </p:txBody>
+      </p:sp>
     </p:spTree>
   </p:cSld>
   <p:clrMapOvr>
@@ -10633,7 +11075,7 @@
                   <a:srgbClr val="FFFFFF"/>
                 </a:solidFill>
               </a:rPr>
-              <a:t>10</a:t>
+              <a:t>13</a:t>
             </a:r>
             <a:endParaRPr lang="en-US" sz="800" dirty="0"/>
           </a:p>
@@ -10717,6 +11159,463 @@
 </file>
 
 <file path=ppt/slides/slide15.xml><?xml version="1.0" encoding="utf-8"?>
+<p:sld xmlns:a="http://schemas.openxmlformats.org/drawingml/2006/main" xmlns:r="http://schemas.openxmlformats.org/officeDocument/2006/relationships" xmlns:p="http://schemas.openxmlformats.org/presentationml/2006/main">
+  <p:cSld>
+    <p:spTree>
+      <p:nvGrpSpPr>
+        <p:cNvPr id="1" name="">
+          <a:extLst>
+            <a:ext uri="{FF2B5EF4-FFF2-40B4-BE49-F238E27FC236}">
+              <a16:creationId xmlns:a16="http://schemas.microsoft.com/office/drawing/2014/main" id="{B6019D27-7528-5A1C-2A9F-61221C831EB9}"/>
+            </a:ext>
+          </a:extLst>
+        </p:cNvPr>
+        <p:cNvGrpSpPr/>
+        <p:nvPr/>
+      </p:nvGrpSpPr>
+      <p:grpSpPr>
+        <a:xfrm>
+          <a:off x="0" y="0"/>
+          <a:ext cx="0" cy="0"/>
+          <a:chOff x="0" y="0"/>
+          <a:chExt cx="0" cy="0"/>
+        </a:xfrm>
+      </p:grpSpPr>
+      <p:sp>
+        <p:nvSpPr>
+          <p:cNvPr id="2" name="Shape 0">
+            <a:extLst>
+              <a:ext uri="{FF2B5EF4-FFF2-40B4-BE49-F238E27FC236}">
+                <a16:creationId xmlns:a16="http://schemas.microsoft.com/office/drawing/2014/main" id="{29235AB7-7A8A-4B23-7F03-5481F08487E3}"/>
+              </a:ext>
+            </a:extLst>
+          </p:cNvPr>
+          <p:cNvSpPr/>
+          <p:nvPr/>
+        </p:nvSpPr>
+        <p:spPr>
+          <a:xfrm>
+            <a:off x="0" y="0"/>
+            <a:ext cx="6858000" cy="502920"/>
+          </a:xfrm>
+          <a:prstGeom prst="rect">
+            <a:avLst/>
+          </a:prstGeom>
+          <a:solidFill>
+            <a:srgbClr val="0A2540"/>
+          </a:solidFill>
+          <a:ln w="12700">
+            <a:solidFill>
+              <a:srgbClr val="0A2540"/>
+            </a:solidFill>
+            <a:prstDash val="solid"/>
+          </a:ln>
+        </p:spPr>
+        <p:txBody>
+          <a:bodyPr/>
+          <a:lstStyle/>
+          <a:p>
+            <a:endParaRPr lang="en-US"/>
+          </a:p>
+        </p:txBody>
+      </p:sp>
+      <p:sp>
+        <p:nvSpPr>
+          <p:cNvPr id="3" name="Shape 1">
+            <a:extLst>
+              <a:ext uri="{FF2B5EF4-FFF2-40B4-BE49-F238E27FC236}">
+                <a16:creationId xmlns:a16="http://schemas.microsoft.com/office/drawing/2014/main" id="{DBD97FBB-003D-8D07-DDDE-4D0FFB876226}"/>
+              </a:ext>
+            </a:extLst>
+          </p:cNvPr>
+          <p:cNvSpPr/>
+          <p:nvPr/>
+        </p:nvSpPr>
+        <p:spPr>
+          <a:xfrm>
+            <a:off x="0" y="8915400"/>
+            <a:ext cx="6858000" cy="228600"/>
+          </a:xfrm>
+          <a:prstGeom prst="rect">
+            <a:avLst/>
+          </a:prstGeom>
+          <a:solidFill>
+            <a:srgbClr val="028090"/>
+          </a:solidFill>
+          <a:ln w="12700">
+            <a:solidFill>
+              <a:srgbClr val="028090"/>
+            </a:solidFill>
+            <a:prstDash val="solid"/>
+          </a:ln>
+        </p:spPr>
+        <p:txBody>
+          <a:bodyPr/>
+          <a:lstStyle/>
+          <a:p>
+            <a:endParaRPr lang="en-US"/>
+          </a:p>
+        </p:txBody>
+      </p:sp>
+      <p:sp>
+        <p:nvSpPr>
+          <p:cNvPr id="4" name="Text 2">
+            <a:extLst>
+              <a:ext uri="{FF2B5EF4-FFF2-40B4-BE49-F238E27FC236}">
+                <a16:creationId xmlns:a16="http://schemas.microsoft.com/office/drawing/2014/main" id="{C3E4165B-CE34-6855-605F-5330E7DE7EE8}"/>
+              </a:ext>
+            </a:extLst>
+          </p:cNvPr>
+          <p:cNvSpPr/>
+          <p:nvPr/>
+        </p:nvSpPr>
+        <p:spPr>
+          <a:xfrm>
+            <a:off x="6217920" y="8915400"/>
+            <a:ext cx="457200" cy="228600"/>
+          </a:xfrm>
+          <a:prstGeom prst="rect">
+            <a:avLst/>
+          </a:prstGeom>
+          <a:noFill/>
+          <a:ln/>
+        </p:spPr>
+        <p:txBody>
+          <a:bodyPr wrap="square" lIns="0" tIns="0" rIns="0" bIns="0" rtlCol="0" anchor="ctr"/>
+          <a:lstStyle/>
+          <a:p>
+            <a:pPr marL="0" indent="0" algn="ctr">
+              <a:buNone/>
+            </a:pPr>
+            <a:r>
+              <a:rPr lang="en-US" sz="800" dirty="0">
+                <a:solidFill>
+                  <a:srgbClr val="FFFFFF"/>
+                </a:solidFill>
+              </a:rPr>
+              <a:t>10</a:t>
+            </a:r>
+            <a:endParaRPr lang="en-US" sz="800" dirty="0"/>
+          </a:p>
+        </p:txBody>
+      </p:sp>
+      <p:sp>
+        <p:nvSpPr>
+          <p:cNvPr id="5" name="Text 3">
+            <a:extLst>
+              <a:ext uri="{FF2B5EF4-FFF2-40B4-BE49-F238E27FC236}">
+                <a16:creationId xmlns:a16="http://schemas.microsoft.com/office/drawing/2014/main" id="{F632E52A-7040-3D0B-2325-BC8D97A99751}"/>
+              </a:ext>
+            </a:extLst>
+          </p:cNvPr>
+          <p:cNvSpPr/>
+          <p:nvPr/>
+        </p:nvSpPr>
+        <p:spPr>
+          <a:xfrm>
+            <a:off x="365760" y="73152"/>
+            <a:ext cx="6126480" cy="347472"/>
+          </a:xfrm>
+          <a:prstGeom prst="rect">
+            <a:avLst/>
+          </a:prstGeom>
+          <a:noFill/>
+          <a:ln/>
+        </p:spPr>
+        <p:txBody>
+          <a:bodyPr wrap="square" lIns="0" tIns="0" rIns="0" bIns="0" rtlCol="0" anchor="ctr"/>
+          <a:lstStyle/>
+          <a:p>
+            <a:pPr marL="0" indent="0">
+              <a:buNone/>
+            </a:pPr>
+            <a:r>
+              <a:rPr lang="en-US" sz="1300" b="1" dirty="0">
+                <a:solidFill>
+                  <a:srgbClr val="FFFFFF"/>
+                </a:solidFill>
+                <a:latin typeface="Calibri" pitchFamily="34" charset="0"/>
+                <a:ea typeface="Calibri" pitchFamily="34" charset="-122"/>
+                <a:cs typeface="Calibri" pitchFamily="34" charset="-120"/>
+              </a:rPr>
+              <a:t>Future Work</a:t>
+            </a:r>
+            <a:endParaRPr lang="en-US" sz="1300" dirty="0"/>
+          </a:p>
+        </p:txBody>
+      </p:sp>
+      <p:sp>
+        <p:nvSpPr>
+          <p:cNvPr id="7" name="Text 5">
+            <a:extLst>
+              <a:ext uri="{FF2B5EF4-FFF2-40B4-BE49-F238E27FC236}">
+                <a16:creationId xmlns:a16="http://schemas.microsoft.com/office/drawing/2014/main" id="{9015997A-FEC0-E626-B6DE-CD58D8F863B3}"/>
+              </a:ext>
+            </a:extLst>
+          </p:cNvPr>
+          <p:cNvSpPr/>
+          <p:nvPr/>
+        </p:nvSpPr>
+        <p:spPr>
+          <a:xfrm>
+            <a:off x="274320" y="576072"/>
+            <a:ext cx="1656678" cy="320040"/>
+          </a:xfrm>
+          <a:prstGeom prst="rect">
+            <a:avLst/>
+          </a:prstGeom>
+          <a:noFill/>
+          <a:ln/>
+        </p:spPr>
+        <p:txBody>
+          <a:bodyPr wrap="square" lIns="0" tIns="0" rIns="0" bIns="0" rtlCol="0" anchor="ctr"/>
+          <a:lstStyle/>
+          <a:p>
+            <a:pPr marL="0" indent="0" algn="ctr">
+              <a:buNone/>
+            </a:pPr>
+            <a:r>
+              <a:rPr lang="en-US" sz="1200" b="1" dirty="0">
+                <a:solidFill>
+                  <a:srgbClr val="FFFFFF"/>
+                </a:solidFill>
+              </a:rPr>
+              <a:t>STRATEGY</a:t>
+            </a:r>
+            <a:endParaRPr lang="en-US" sz="1200" dirty="0"/>
+          </a:p>
+        </p:txBody>
+      </p:sp>
+      <p:sp>
+        <p:nvSpPr>
+          <p:cNvPr id="16" name="Shape 13">
+            <a:extLst>
+              <a:ext uri="{FF2B5EF4-FFF2-40B4-BE49-F238E27FC236}">
+                <a16:creationId xmlns:a16="http://schemas.microsoft.com/office/drawing/2014/main" id="{E117ECD9-6004-9392-E78B-EFD124FFB5B7}"/>
+              </a:ext>
+            </a:extLst>
+          </p:cNvPr>
+          <p:cNvSpPr/>
+          <p:nvPr/>
+        </p:nvSpPr>
+        <p:spPr>
+          <a:xfrm>
+            <a:off x="0" y="8915400"/>
+            <a:ext cx="6858000" cy="228600"/>
+          </a:xfrm>
+          <a:prstGeom prst="rect">
+            <a:avLst/>
+          </a:prstGeom>
+          <a:solidFill>
+            <a:srgbClr val="028090"/>
+          </a:solidFill>
+          <a:ln w="12700">
+            <a:solidFill>
+              <a:srgbClr val="028090"/>
+            </a:solidFill>
+            <a:prstDash val="solid"/>
+          </a:ln>
+        </p:spPr>
+        <p:txBody>
+          <a:bodyPr/>
+          <a:lstStyle/>
+          <a:p>
+            <a:endParaRPr lang="en-US"/>
+          </a:p>
+        </p:txBody>
+      </p:sp>
+      <p:sp>
+        <p:nvSpPr>
+          <p:cNvPr id="17" name="Text 14">
+            <a:extLst>
+              <a:ext uri="{FF2B5EF4-FFF2-40B4-BE49-F238E27FC236}">
+                <a16:creationId xmlns:a16="http://schemas.microsoft.com/office/drawing/2014/main" id="{4E965A06-0394-1B61-ED22-75332ABB7B59}"/>
+              </a:ext>
+            </a:extLst>
+          </p:cNvPr>
+          <p:cNvSpPr/>
+          <p:nvPr/>
+        </p:nvSpPr>
+        <p:spPr>
+          <a:xfrm>
+            <a:off x="6217920" y="8915400"/>
+            <a:ext cx="457200" cy="228600"/>
+          </a:xfrm>
+          <a:prstGeom prst="rect">
+            <a:avLst/>
+          </a:prstGeom>
+          <a:noFill/>
+          <a:ln/>
+        </p:spPr>
+        <p:txBody>
+          <a:bodyPr wrap="square" lIns="0" tIns="0" rIns="0" bIns="0" rtlCol="0" anchor="ctr"/>
+          <a:lstStyle/>
+          <a:p>
+            <a:pPr marL="0" indent="0" algn="ctr">
+              <a:buNone/>
+            </a:pPr>
+            <a:r>
+              <a:rPr lang="en-US" sz="800" dirty="0">
+                <a:solidFill>
+                  <a:srgbClr val="FFFFFF"/>
+                </a:solidFill>
+              </a:rPr>
+              <a:t>14</a:t>
+            </a:r>
+            <a:endParaRPr lang="en-US" sz="800" dirty="0"/>
+          </a:p>
+        </p:txBody>
+      </p:sp>
+      <p:sp>
+        <p:nvSpPr>
+          <p:cNvPr id="20" name="TextBox 19">
+            <a:extLst>
+              <a:ext uri="{FF2B5EF4-FFF2-40B4-BE49-F238E27FC236}">
+                <a16:creationId xmlns:a16="http://schemas.microsoft.com/office/drawing/2014/main" id="{18DAA0A3-2CEE-A713-E69E-D8CAA40C597C}"/>
+              </a:ext>
+            </a:extLst>
+          </p:cNvPr>
+          <p:cNvSpPr txBox="1"/>
+          <p:nvPr/>
+        </p:nvSpPr>
+        <p:spPr>
+          <a:xfrm>
+            <a:off x="209774" y="905256"/>
+            <a:ext cx="6309360" cy="4339650"/>
+          </a:xfrm>
+          <a:prstGeom prst="rect">
+            <a:avLst/>
+          </a:prstGeom>
+          <a:noFill/>
+        </p:spPr>
+        <p:txBody>
+          <a:bodyPr wrap="square" rtlCol="0">
+            <a:spAutoFit/>
+          </a:bodyPr>
+          <a:lstStyle/>
+          <a:p>
+            <a:r>
+              <a:rPr lang="en-US" sz="1200" b="1" dirty="0"/>
+              <a:t>Expand </a:t>
+            </a:r>
+            <a:r>
+              <a:rPr lang="en-US" sz="1200" b="1" dirty="0" err="1"/>
+              <a:t>PhoneScore</a:t>
+            </a:r>
+            <a:r>
+              <a:rPr lang="en-US" sz="1200" b="1" dirty="0"/>
+              <a:t> / </a:t>
+            </a:r>
+            <a:r>
+              <a:rPr lang="en-US" sz="1200" b="1" dirty="0" err="1"/>
+              <a:t>AddressScore</a:t>
+            </a:r>
+            <a:r>
+              <a:rPr lang="en-US" sz="1200" b="1" dirty="0"/>
+              <a:t> coverage</a:t>
+            </a:r>
+            <a:br>
+              <a:rPr lang="en-US" sz="1200" dirty="0"/>
+            </a:br>
+            <a:r>
+              <a:rPr lang="en-US" sz="1200" dirty="0"/>
+              <a:t>Verification signals currently cover only part of the dataset (</a:t>
+            </a:r>
+            <a:r>
+              <a:rPr lang="en-US" sz="1200" dirty="0" err="1"/>
+              <a:t>PhoneScore</a:t>
+            </a:r>
+            <a:r>
+              <a:rPr lang="en-US" sz="1200" dirty="0"/>
+              <a:t> ~46%, </a:t>
+            </a:r>
+            <a:r>
+              <a:rPr lang="en-US" sz="1200" dirty="0" err="1"/>
+              <a:t>AddressScore</a:t>
+            </a:r>
+            <a:r>
+              <a:rPr lang="en-US" sz="1200" dirty="0"/>
+              <a:t> ~39%). As coverage improves over time, </a:t>
+            </a:r>
+            <a:r>
+              <a:rPr lang="en-US" sz="1200" dirty="0" err="1"/>
+              <a:t>PhoneScore</a:t>
+            </a:r>
+            <a:r>
+              <a:rPr lang="en-US" sz="1200" dirty="0"/>
+              <a:t>, particularly Score 5, can be used as a scalable quality filter rather than an aggressive or niche segmentation strategy.</a:t>
+            </a:r>
+          </a:p>
+          <a:p>
+            <a:endParaRPr lang="en-US" sz="1200" dirty="0"/>
+          </a:p>
+          <a:p>
+            <a:r>
+              <a:rPr lang="en-US" sz="1200" b="1" dirty="0"/>
+              <a:t>Keyword-level NLP analysis of search intent</a:t>
+            </a:r>
+            <a:br>
+              <a:rPr lang="en-US" sz="1200" dirty="0"/>
+            </a:br>
+            <a:r>
+              <a:rPr lang="en-US" sz="1200" dirty="0"/>
+              <a:t>Columns containing the referring keyword string and search queries provide an opportunity to analyze user intent. Applying NLP techniques (e.g., keyword clustering or embedding-based similarity) could reveal related high-intent terms and expand the set of queries that trigger high-quality ads.</a:t>
+            </a:r>
+          </a:p>
+          <a:p>
+            <a:br>
+              <a:rPr lang="en-US" sz="1200" dirty="0"/>
+            </a:br>
+            <a:endParaRPr lang="en-US" sz="1200" dirty="0"/>
+          </a:p>
+          <a:p>
+            <a:r>
+              <a:rPr lang="en-US" sz="1200" b="1" dirty="0"/>
+              <a:t>Multivariate modeling of lead quality</a:t>
+            </a:r>
+            <a:br>
+              <a:rPr lang="en-US" sz="1200" dirty="0"/>
+            </a:br>
+            <a:r>
+              <a:rPr lang="en-US" sz="1200" dirty="0"/>
+              <a:t>Current analysis evaluates drivers individually or at most consider two at a time. Future work could build a multivariate model (e.g., logistic regression or gradient boosting) to estimate the marginal impact of each variable while controlling for others, allowing more precise optimization of lead acquisition.</a:t>
+            </a:r>
+          </a:p>
+          <a:p>
+            <a:br>
+              <a:rPr lang="en-US" sz="1200" dirty="0"/>
+            </a:br>
+            <a:endParaRPr lang="en-US" sz="1200" dirty="0"/>
+          </a:p>
+          <a:p>
+            <a:r>
+              <a:rPr lang="en-US" sz="1200" b="1" dirty="0"/>
+              <a:t>Cost-efficiency optimization</a:t>
+            </a:r>
+            <a:br>
+              <a:rPr lang="en-US" sz="1200" dirty="0"/>
+            </a:br>
+            <a:r>
+              <a:rPr lang="en-US" sz="1200" dirty="0"/>
+              <a:t>The current strategy optimizes for quality rate. A next step would be to optimize for expected profit by combining quality probability, CPL, and conversion value, identifying segments that maximize expected ROI rather than quality alone.</a:t>
+            </a:r>
+          </a:p>
+        </p:txBody>
+      </p:sp>
+    </p:spTree>
+    <p:extLst>
+      <p:ext uri="{BB962C8B-B14F-4D97-AF65-F5344CB8AC3E}">
+        <p14:creationId xmlns:p14="http://schemas.microsoft.com/office/powerpoint/2010/main" val="2471584743"/>
+      </p:ext>
+    </p:extLst>
+  </p:cSld>
+  <p:clrMapOvr>
+    <a:masterClrMapping/>
+  </p:clrMapOvr>
+</p:sld>
+</file>
+
+<file path=ppt/slides/slide16.xml><?xml version="1.0" encoding="utf-8"?>
 <p:sld xmlns:a="http://schemas.openxmlformats.org/drawingml/2006/main" xmlns:r="http://schemas.openxmlformats.org/officeDocument/2006/relationships" xmlns:p="http://schemas.openxmlformats.org/presentationml/2006/main">
   <p:cSld name="Slide 11">
     <p:bg>
@@ -10838,7 +11737,7 @@
                 <a:ea typeface="Calibri" pitchFamily="34" charset="-122"/>
                 <a:cs typeface="Calibri" pitchFamily="34" charset="-120"/>
               </a:rPr>
-              <a:t>Conclusions &amp; Recommendations</a:t>
+              <a:t>Conclusions</a:t>
             </a:r>
             <a:endParaRPr lang="en-US" sz="1800" dirty="0"/>
           </a:p>
@@ -11819,7 +12718,7 @@
                   <a:srgbClr val="FFFFFF"/>
                 </a:solidFill>
               </a:rPr>
-              <a:t>11</a:t>
+              <a:t>15</a:t>
             </a:r>
             <a:endParaRPr lang="en-US" sz="800" dirty="0"/>
           </a:p>
@@ -12199,7 +13098,7 @@
                   <a:srgbClr val="8899A6"/>
                 </a:solidFill>
               </a:rPr>
-              <a:t>p. 4</a:t>
+              <a:t>p. 3</a:t>
             </a:r>
             <a:endParaRPr lang="en-US" sz="900" dirty="0"/>
           </a:p>
@@ -12449,7 +13348,7 @@
                   <a:srgbClr val="028090"/>
                 </a:solidFill>
               </a:rPr>
-              <a:t>p. 5–14</a:t>
+              <a:t>p. 4–12</a:t>
             </a:r>
             <a:endParaRPr lang="en-US" sz="900" dirty="0"/>
           </a:p>
@@ -12665,7 +13564,7 @@
                   <a:srgbClr val="F4A261"/>
                 </a:solidFill>
               </a:rPr>
-              <a:t>p. 15</a:t>
+              <a:t>p. 13</a:t>
             </a:r>
             <a:endParaRPr lang="en-US" sz="900" dirty="0"/>
           </a:p>
@@ -12806,7 +13705,7 @@
                 <a:ea typeface="Calibri" pitchFamily="34" charset="-122"/>
                 <a:cs typeface="Calibri" pitchFamily="34" charset="-120"/>
               </a:rPr>
-              <a:t>Conclusions &amp; Recommendations</a:t>
+              <a:t>Future Work &amp; Conclusions</a:t>
             </a:r>
             <a:endParaRPr lang="en-US" sz="1200" dirty="0"/>
           </a:p>
@@ -12881,7 +13780,7 @@
                   <a:srgbClr val="0A2540"/>
                 </a:solidFill>
               </a:rPr>
-              <a:t>p. 16</a:t>
+              <a:t>p. 14-15</a:t>
             </a:r>
             <a:endParaRPr lang="en-US" sz="900" dirty="0"/>
           </a:p>
@@ -16206,8 +17105,8 @@
         </p:nvSpPr>
         <p:spPr>
           <a:xfrm>
-            <a:off x="274320" y="6400710"/>
-            <a:ext cx="6309360" cy="1691640"/>
+            <a:off x="274320" y="6400709"/>
+            <a:ext cx="6309360" cy="1861163"/>
           </a:xfrm>
           <a:prstGeom prst="rect">
             <a:avLst/>
